--- a/docs/quickguides/pptx/14_Quick_Guide_oneSCM_Marktrolle_Produkt_und_Preispflege_sowie_Administration.pptx
+++ b/docs/quickguides/pptx/14_Quick_Guide_oneSCM_Marktrolle_Produkt_und_Preispflege_sowie_Administration.pptx
@@ -1213,11 +1213,11 @@
         <p:spPr>
           <a:xfrm>
             <a:off x="201168" y="713232"/>
-            <a:ext cx="4663440" cy="1335024"/>
+            <a:ext cx="4663440" cy="1426464"/>
           </a:xfrm>
           <a:prstGeom prst="roundRect">
             <a:avLst>
-              <a:gd name="adj" fmla="val 6849"/>
+              <a:gd name="adj" fmla="val 6410"/>
             </a:avLst>
           </a:prstGeom>
           <a:solidFill>
@@ -1281,7 +1281,7 @@
         <p:spPr>
           <a:xfrm>
             <a:off x="310896" y="1060704"/>
-            <a:ext cx="2633472" cy="932688"/>
+            <a:ext cx="2633472" cy="1024128"/>
           </a:xfrm>
           <a:prstGeom prst="rect">
             <a:avLst/>
@@ -1446,12 +1446,20 @@
           </a:p>
         </p:txBody>
       </p:sp>
-      <p:sp>
-        <p:nvSpPr>
-          <p:cNvPr id="11" name="Screenshot-Rahmen"/>
-          <p:cNvSpPr/>
+      <p:pic>
+        <p:nvPicPr>
+          <p:cNvPr id="11" name="Kapitelbild" descr="/tmp/claude-0/-home-user-step2-oneSCM/768b354c-b2c6-524c-b102-2abaf010b0fe/scratchpad/qg/src/img/badge_14.png">    </p:cNvPr>
+          <p:cNvPicPr>
+            <a:picLocks noChangeAspect="1"/>
+          </p:cNvPicPr>
           <p:nvPr/>
-        </p:nvSpPr>
+        </p:nvPicPr>
+        <p:blipFill>
+          <a:blip r:embed="rId3"/>
+          <a:stretch>
+            <a:fillRect/>
+          </a:stretch>
+        </p:blipFill>
         <p:spPr>
           <a:xfrm>
             <a:off x="3035808" y="804672"/>
@@ -1460,82 +1468,17 @@
           <a:prstGeom prst="rect">
             <a:avLst/>
           </a:prstGeom>
-          <a:solidFill>
-            <a:srgbClr val="F3F3F3"/>
-          </a:solidFill>
-          <a:ln w="6350">
-            <a:solidFill>
-              <a:srgbClr val="BFBFBF"/>
-            </a:solidFill>
-            <a:prstDash val="solid"/>
-          </a:ln>
-        </p:spPr>
-      </p:sp>
-      <p:sp>
-        <p:nvSpPr>
-          <p:cNvPr id="12" name="Screenshot-Beschriftung"/>
+        </p:spPr>
+      </p:pic>
+      <p:sp>
+        <p:nvSpPr>
+          <p:cNvPr id="12" name="Hinweis"/>
           <p:cNvSpPr txBox="1"/>
           <p:nvPr/>
         </p:nvSpPr>
         <p:spPr>
           <a:xfrm>
-            <a:off x="3035808" y="804672"/>
-            <a:ext cx="1737360" cy="1051560"/>
-          </a:xfrm>
-          <a:prstGeom prst="rect">
-            <a:avLst/>
-          </a:prstGeom>
-          <a:noFill/>
-          <a:ln/>
-        </p:spPr>
-        <p:txBody>
-          <a:bodyPr wrap="square" lIns="50800" tIns="50800" rIns="50800" bIns="50800" rtlCol="0" anchor="ctr"/>
-          <a:lstStyle/>
-          <a:p>
-            <a:pPr algn="ctr" indent="0" marL="0">
-              <a:buNone/>
-            </a:pPr>
-            <a:r>
-              <a:rPr lang="en-US" sz="700" b="1" dirty="0">
-                <a:solidFill>
-                  <a:srgbClr val="404040"/>
-                </a:solidFill>
-                <a:latin typeface="MB Corpo S Text Office" pitchFamily="34" charset="0"/>
-                <a:ea typeface="MB Corpo S Text Office" pitchFamily="34" charset="-122"/>
-                <a:cs typeface="MB Corpo S Text Office" pitchFamily="34" charset="-120"/>
-              </a:rPr>
-              <a:t>Screenshot</a:t>
-            </a:r>
-            <a:endParaRPr lang="en-US" sz="700" dirty="0"/>
-          </a:p>
-          <a:p>
-            <a:pPr algn="ctr" indent="0" marL="0">
-              <a:buNone/>
-            </a:pPr>
-            <a:r>
-              <a:rPr lang="en-US" sz="700" dirty="0">
-                <a:solidFill>
-                  <a:srgbClr val="404040"/>
-                </a:solidFill>
-                <a:latin typeface="MB Corpo S Text Office" pitchFamily="34" charset="0"/>
-                <a:ea typeface="MB Corpo S Text Office" pitchFamily="34" charset="-122"/>
-                <a:cs typeface="MB Corpo S Text Office" pitchFamily="34" charset="-120"/>
-              </a:rPr>
-              <a:t>Administrationsbereich</a:t>
-            </a:r>
-            <a:endParaRPr lang="en-US" sz="700" dirty="0"/>
-          </a:p>
-        </p:txBody>
-      </p:sp>
-      <p:sp>
-        <p:nvSpPr>
-          <p:cNvPr id="13" name="Hinweis"/>
-          <p:cNvSpPr txBox="1"/>
-          <p:nvPr/>
-        </p:nvSpPr>
-        <p:spPr>
-          <a:xfrm>
-            <a:off x="201168" y="2157984"/>
+            <a:off x="201168" y="2249424"/>
             <a:ext cx="4663440" cy="329184"/>
           </a:xfrm>
           <a:prstGeom prst="rect">
@@ -1568,13 +1511,13 @@
       </p:sp>
       <p:sp>
         <p:nvSpPr>
-          <p:cNvPr id="14" name="Überblick Titel"/>
+          <p:cNvPr id="13" name="Überblick Titel"/>
           <p:cNvSpPr txBox="1"/>
           <p:nvPr/>
         </p:nvSpPr>
         <p:spPr>
           <a:xfrm>
-            <a:off x="201168" y="2596896"/>
+            <a:off x="201168" y="2688336"/>
             <a:ext cx="4663440" cy="256032"/>
           </a:xfrm>
           <a:prstGeom prst="rect">
@@ -1607,13 +1550,202 @@
       </p:sp>
       <p:sp>
         <p:nvSpPr>
+          <p:cNvPr id="14" name="Überblick Spalte"/>
+          <p:cNvSpPr txBox="1"/>
+          <p:nvPr/>
+        </p:nvSpPr>
+        <p:spPr>
+          <a:xfrm>
+            <a:off x="201168" y="2962656"/>
+            <a:ext cx="2240280" cy="2240280"/>
+          </a:xfrm>
+          <a:prstGeom prst="rect">
+            <a:avLst/>
+          </a:prstGeom>
+          <a:noFill/>
+          <a:ln/>
+        </p:spPr>
+        <p:txBody>
+          <a:bodyPr wrap="square" lIns="0" tIns="0" rIns="0" bIns="0" rtlCol="0" anchor="t"/>
+          <a:lstStyle/>
+          <a:p>
+            <a:pPr indent="0" marL="0">
+              <a:spcAft>
+                <a:spcPts val="200"/>
+              </a:spcAft>
+              <a:buNone/>
+            </a:pPr>
+            <a:r>
+              <a:rPr lang="en-US" sz="900" b="1" dirty="0">
+                <a:solidFill>
+                  <a:srgbClr val="B21E23"/>
+                </a:solidFill>
+                <a:latin typeface="MB Corpo S Text Office" pitchFamily="34" charset="0"/>
+                <a:ea typeface="MB Corpo S Text Office" pitchFamily="34" charset="-122"/>
+                <a:cs typeface="MB Corpo S Text Office" pitchFamily="34" charset="-120"/>
+              </a:rPr>
+              <a:t>14.1 – 14.7 Markt und Administration</a:t>
+            </a:r>
+            <a:endParaRPr lang="en-US" sz="900" dirty="0"/>
+          </a:p>
+          <a:p>
+            <a:pPr marL="152400" indent="-152400">
+              <a:spcAft>
+                <a:spcPts val="100"/>
+              </a:spcAft>
+              <a:buSzPct val="100000"/>
+              <a:buChar char="•"/>
+            </a:pPr>
+            <a:r>
+              <a:rPr lang="en-US" sz="900" dirty="0">
+                <a:solidFill>
+                  <a:srgbClr val="262626"/>
+                </a:solidFill>
+                <a:latin typeface="MB Corpo S Text Office" pitchFamily="34" charset="0"/>
+                <a:ea typeface="MB Corpo S Text Office" pitchFamily="34" charset="-122"/>
+                <a:cs typeface="MB Corpo S Text Office" pitchFamily="34" charset="-120"/>
+              </a:rPr>
+              <a:t>Aufgaben und Abgrenzung der Marktrolle</a:t>
+            </a:r>
+            <a:endParaRPr lang="en-US" sz="900" dirty="0"/>
+          </a:p>
+          <a:p>
+            <a:pPr marL="152400" indent="-152400">
+              <a:spcAft>
+                <a:spcPts val="100"/>
+              </a:spcAft>
+              <a:buSzPct val="100000"/>
+              <a:buChar char="•"/>
+            </a:pPr>
+            <a:r>
+              <a:rPr lang="en-US" sz="900" dirty="0">
+                <a:solidFill>
+                  <a:srgbClr val="262626"/>
+                </a:solidFill>
+                <a:latin typeface="MB Corpo S Text Office" pitchFamily="34" charset="0"/>
+                <a:ea typeface="MB Corpo S Text Office" pitchFamily="34" charset="-122"/>
+                <a:cs typeface="MB Corpo S Text Office" pitchFamily="34" charset="-120"/>
+              </a:rPr>
+              <a:t>Marktspezifische Einstellungen</a:t>
+            </a:r>
+            <a:endParaRPr lang="en-US" sz="900" dirty="0"/>
+          </a:p>
+          <a:p>
+            <a:pPr marL="152400" indent="-152400">
+              <a:spcAft>
+                <a:spcPts val="100"/>
+              </a:spcAft>
+              <a:buSzPct val="100000"/>
+              <a:buChar char="•"/>
+            </a:pPr>
+            <a:r>
+              <a:rPr lang="en-US" sz="900" dirty="0">
+                <a:solidFill>
+                  <a:srgbClr val="262626"/>
+                </a:solidFill>
+                <a:latin typeface="MB Corpo S Text Office" pitchFamily="34" charset="0"/>
+                <a:ea typeface="MB Corpo S Text Office" pitchFamily="34" charset="-122"/>
+                <a:cs typeface="MB Corpo S Text Office" pitchFamily="34" charset="-120"/>
+              </a:rPr>
+              <a:t>Länderabweichungen vom Blueprint</a:t>
+            </a:r>
+            <a:endParaRPr lang="en-US" sz="900" dirty="0"/>
+          </a:p>
+          <a:p>
+            <a:pPr marL="152400" indent="-152400">
+              <a:spcAft>
+                <a:spcPts val="100"/>
+              </a:spcAft>
+              <a:buSzPct val="100000"/>
+              <a:buChar char="•"/>
+            </a:pPr>
+            <a:r>
+              <a:rPr lang="en-US" sz="900" dirty="0">
+                <a:solidFill>
+                  <a:srgbClr val="262626"/>
+                </a:solidFill>
+                <a:latin typeface="MB Corpo S Text Office" pitchFamily="34" charset="0"/>
+                <a:ea typeface="MB Corpo S Text Office" pitchFamily="34" charset="-122"/>
+                <a:cs typeface="MB Corpo S Text Office" pitchFamily="34" charset="-120"/>
+              </a:rPr>
+              <a:t>Vorlagenverwaltung und Template Management</a:t>
+            </a:r>
+            <a:endParaRPr lang="en-US" sz="900" dirty="0"/>
+          </a:p>
+          <a:p>
+            <a:pPr marL="152400" indent="-152400">
+              <a:spcAft>
+                <a:spcPts val="100"/>
+              </a:spcAft>
+              <a:buSzPct val="100000"/>
+              <a:buChar char="•"/>
+            </a:pPr>
+            <a:r>
+              <a:rPr lang="en-US" sz="900" dirty="0">
+                <a:solidFill>
+                  <a:srgbClr val="262626"/>
+                </a:solidFill>
+                <a:latin typeface="MB Corpo S Text Office" pitchFamily="34" charset="0"/>
+                <a:ea typeface="MB Corpo S Text Office" pitchFamily="34" charset="-122"/>
+                <a:cs typeface="MB Corpo S Text Office" pitchFamily="34" charset="-120"/>
+              </a:rPr>
+              <a:t>Administrationsbereich und zulässige Aktionen</a:t>
+            </a:r>
+            <a:endParaRPr lang="en-US" sz="900" dirty="0"/>
+          </a:p>
+          <a:p>
+            <a:pPr marL="152400" indent="-152400">
+              <a:spcAft>
+                <a:spcPts val="100"/>
+              </a:spcAft>
+              <a:buSzPct val="100000"/>
+              <a:buChar char="•"/>
+            </a:pPr>
+            <a:r>
+              <a:rPr lang="en-US" sz="900" dirty="0">
+                <a:solidFill>
+                  <a:srgbClr val="262626"/>
+                </a:solidFill>
+                <a:latin typeface="MB Corpo S Text Office" pitchFamily="34" charset="0"/>
+                <a:ea typeface="MB Corpo S Text Office" pitchFamily="34" charset="-122"/>
+                <a:cs typeface="MB Corpo S Text Office" pitchFamily="34" charset="-120"/>
+              </a:rPr>
+              <a:t>Marktbezogene Sichtbarkeit und Berechtigungen</a:t>
+            </a:r>
+            <a:endParaRPr lang="en-US" sz="900" dirty="0"/>
+          </a:p>
+          <a:p>
+            <a:pPr marL="152400" indent="-152400">
+              <a:spcAft>
+                <a:spcPts val="100"/>
+              </a:spcAft>
+              <a:buSzPct val="100000"/>
+              <a:buChar char="•"/>
+            </a:pPr>
+            <a:r>
+              <a:rPr lang="en-US" sz="900" dirty="0">
+                <a:solidFill>
+                  <a:srgbClr val="262626"/>
+                </a:solidFill>
+                <a:latin typeface="MB Corpo S Text Office" pitchFamily="34" charset="0"/>
+                <a:ea typeface="MB Corpo S Text Office" pitchFamily="34" charset="-122"/>
+                <a:cs typeface="MB Corpo S Text Office" pitchFamily="34" charset="-120"/>
+              </a:rPr>
+              <a:t>Änderungen prüfen, freigeben und dokumentieren</a:t>
+            </a:r>
+            <a:endParaRPr lang="en-US" sz="900" dirty="0"/>
+          </a:p>
+        </p:txBody>
+      </p:sp>
+      <p:sp>
+        <p:nvSpPr>
           <p:cNvPr id="15" name="Überblick Spalte"/>
           <p:cNvSpPr txBox="1"/>
           <p:nvPr/>
         </p:nvSpPr>
         <p:spPr>
           <a:xfrm>
-            <a:off x="201168" y="2871216"/>
+            <a:off x="2624328" y="2962656"/>
             <a:ext cx="2240280" cy="2240280"/>
           </a:xfrm>
           <a:prstGeom prst="rect">
@@ -1641,7 +1773,7 @@
                 <a:ea typeface="MB Corpo S Text Office" pitchFamily="34" charset="-122"/>
                 <a:cs typeface="MB Corpo S Text Office" pitchFamily="34" charset="-120"/>
               </a:rPr>
-              <a:t>14.1 – 14.7 Markt und Administration</a:t>
+              <a:t>14.8 – 14.14 Produkt, Preis, Kampagne</a:t>
             </a:r>
             <a:endParaRPr lang="en-US" sz="900" dirty="0"/>
           </a:p>
@@ -1662,7 +1794,7 @@
                 <a:ea typeface="MB Corpo S Text Office" pitchFamily="34" charset="-122"/>
                 <a:cs typeface="MB Corpo S Text Office" pitchFamily="34" charset="-120"/>
               </a:rPr>
-              <a:t>Aufgaben und Abgrenzung der Marktrolle</a:t>
+              <a:t>Produktdefinition, Anlage und Veröffentlichung</a:t>
             </a:r>
             <a:endParaRPr lang="en-US" sz="900" dirty="0"/>
           </a:p>
@@ -1683,7 +1815,7 @@
                 <a:ea typeface="MB Corpo S Text Office" pitchFamily="34" charset="-122"/>
                 <a:cs typeface="MB Corpo S Text Office" pitchFamily="34" charset="-120"/>
               </a:rPr>
-              <a:t>Marktspezifische Einstellungen</a:t>
+              <a:t>Preisversionen, Cluster und Faktorgrenzen</a:t>
             </a:r>
             <a:endParaRPr lang="en-US" sz="900" dirty="0"/>
           </a:p>
@@ -1704,7 +1836,7 @@
                 <a:ea typeface="MB Corpo S Text Office" pitchFamily="34" charset="-122"/>
                 <a:cs typeface="MB Corpo S Text Office" pitchFamily="34" charset="-120"/>
               </a:rPr>
-              <a:t>Länderabweichungen vom Blueprint</a:t>
+              <a:t>Produktänderung, Versionierung und Bestandswirkung</a:t>
             </a:r>
             <a:endParaRPr lang="en-US" sz="900" dirty="0"/>
           </a:p>
@@ -1725,7 +1857,7 @@
                 <a:ea typeface="MB Corpo S Text Office" pitchFamily="34" charset="-122"/>
                 <a:cs typeface="MB Corpo S Text Office" pitchFamily="34" charset="-120"/>
               </a:rPr>
-              <a:t>Vorlagenverwaltung und Template Management</a:t>
+              <a:t>Fahrzeuggruppen und Van-Baumuster-Clustering</a:t>
             </a:r>
             <a:endParaRPr lang="en-US" sz="900" dirty="0"/>
           </a:p>
@@ -1746,7 +1878,7 @@
                 <a:ea typeface="MB Corpo S Text Office" pitchFamily="34" charset="-122"/>
                 <a:cs typeface="MB Corpo S Text Office" pitchFamily="34" charset="-120"/>
               </a:rPr>
-              <a:t>Administrationsbereich und zulässige Aktionen</a:t>
+              <a:t>Product Testing als Arbeitsbereich</a:t>
             </a:r>
             <a:endParaRPr lang="en-US" sz="900" dirty="0"/>
           </a:p>
@@ -1767,7 +1899,7 @@
                 <a:ea typeface="MB Corpo S Text Office" pitchFamily="34" charset="-122"/>
                 <a:cs typeface="MB Corpo S Text Office" pitchFamily="34" charset="-120"/>
               </a:rPr>
-              <a:t>Marktbezogene Sichtbarkeit und Berechtigungen</a:t>
+              <a:t>Kampagnenanlage und Rabattpflege</a:t>
             </a:r>
             <a:endParaRPr lang="en-US" sz="900" dirty="0"/>
           </a:p>
@@ -1788,22 +1920,46 @@
                 <a:ea typeface="MB Corpo S Text Office" pitchFamily="34" charset="-122"/>
                 <a:cs typeface="MB Corpo S Text Office" pitchFamily="34" charset="-120"/>
               </a:rPr>
-              <a:t>Änderungen prüfen, freigeben und dokumentieren</a:t>
+              <a:t>Preiskomponenten, Cost Unit Split und Inflation</a:t>
             </a:r>
             <a:endParaRPr lang="en-US" sz="900" dirty="0"/>
           </a:p>
         </p:txBody>
       </p:sp>
-      <p:sp>
-        <p:nvSpPr>
-          <p:cNvPr id="16" name="Überblick Spalte"/>
+      <p:pic>
+        <p:nvPicPr>
+          <p:cNvPr id="16" name="Prozessbild" descr="/tmp/claude-0/-home-user-step2-oneSCM/768b354c-b2c6-524c-b102-2abaf010b0fe/scratchpad/qg/src/img/flow_14.png">    </p:cNvPr>
+          <p:cNvPicPr>
+            <a:picLocks noChangeAspect="1"/>
+          </p:cNvPicPr>
+          <p:nvPr/>
+        </p:nvPicPr>
+        <p:blipFill>
+          <a:blip r:embed="rId4"/>
+          <a:stretch>
+            <a:fillRect/>
+          </a:stretch>
+        </p:blipFill>
+        <p:spPr>
+          <a:xfrm>
+            <a:off x="5047488" y="713232"/>
+            <a:ext cx="4663440" cy="1508760"/>
+          </a:xfrm>
+          <a:prstGeom prst="rect">
+            <a:avLst/>
+          </a:prstGeom>
+        </p:spPr>
+      </p:pic>
+      <p:sp>
+        <p:nvSpPr>
+          <p:cNvPr id="17" name="Abschnittstitel"/>
           <p:cNvSpPr txBox="1"/>
           <p:nvPr/>
         </p:nvSpPr>
         <p:spPr>
           <a:xfrm>
-            <a:off x="2624328" y="2871216"/>
-            <a:ext cx="2240280" cy="2240280"/>
+            <a:off x="5047488" y="2331720"/>
+            <a:ext cx="4663440" cy="256032"/>
           </a:xfrm>
           <a:prstGeom prst="rect">
             <a:avLst/>
@@ -1816,183 +1972,33 @@
           <a:lstStyle/>
           <a:p>
             <a:pPr indent="0" marL="0">
-              <a:spcAft>
-                <a:spcPts val="200"/>
-              </a:spcAft>
               <a:buNone/>
             </a:pPr>
             <a:r>
-              <a:rPr lang="en-US" sz="900" b="1" dirty="0">
-                <a:solidFill>
-                  <a:srgbClr val="B21E23"/>
-                </a:solidFill>
-                <a:latin typeface="MB Corpo S Text Office" pitchFamily="34" charset="0"/>
-                <a:ea typeface="MB Corpo S Text Office" pitchFamily="34" charset="-122"/>
-                <a:cs typeface="MB Corpo S Text Office" pitchFamily="34" charset="-120"/>
-              </a:rPr>
-              <a:t>14.8 – 14.14 Produkt, Preis, Kampagne</a:t>
-            </a:r>
-            <a:endParaRPr lang="en-US" sz="900" dirty="0"/>
-          </a:p>
-          <a:p>
-            <a:pPr marL="152400" indent="-152400">
-              <a:spcAft>
-                <a:spcPts val="100"/>
-              </a:spcAft>
-              <a:buSzPct val="100000"/>
-              <a:buChar char="•"/>
-            </a:pPr>
-            <a:r>
-              <a:rPr lang="en-US" sz="900" dirty="0">
-                <a:solidFill>
-                  <a:srgbClr val="262626"/>
-                </a:solidFill>
-                <a:latin typeface="MB Corpo S Text Office" pitchFamily="34" charset="0"/>
-                <a:ea typeface="MB Corpo S Text Office" pitchFamily="34" charset="-122"/>
-                <a:cs typeface="MB Corpo S Text Office" pitchFamily="34" charset="-120"/>
-              </a:rPr>
-              <a:t>Produktdefinition, Anlage und Veröffentlichung</a:t>
-            </a:r>
-            <a:endParaRPr lang="en-US" sz="900" dirty="0"/>
-          </a:p>
-          <a:p>
-            <a:pPr marL="152400" indent="-152400">
-              <a:spcAft>
-                <a:spcPts val="100"/>
-              </a:spcAft>
-              <a:buSzPct val="100000"/>
-              <a:buChar char="•"/>
-            </a:pPr>
-            <a:r>
-              <a:rPr lang="en-US" sz="900" dirty="0">
-                <a:solidFill>
-                  <a:srgbClr val="262626"/>
-                </a:solidFill>
-                <a:latin typeface="MB Corpo S Text Office" pitchFamily="34" charset="0"/>
-                <a:ea typeface="MB Corpo S Text Office" pitchFamily="34" charset="-122"/>
-                <a:cs typeface="MB Corpo S Text Office" pitchFamily="34" charset="-120"/>
-              </a:rPr>
-              <a:t>Preisversionen, Cluster und Faktorgrenzen</a:t>
-            </a:r>
-            <a:endParaRPr lang="en-US" sz="900" dirty="0"/>
-          </a:p>
-          <a:p>
-            <a:pPr marL="152400" indent="-152400">
-              <a:spcAft>
-                <a:spcPts val="100"/>
-              </a:spcAft>
-              <a:buSzPct val="100000"/>
-              <a:buChar char="•"/>
-            </a:pPr>
-            <a:r>
-              <a:rPr lang="en-US" sz="900" dirty="0">
-                <a:solidFill>
-                  <a:srgbClr val="262626"/>
-                </a:solidFill>
-                <a:latin typeface="MB Corpo S Text Office" pitchFamily="34" charset="0"/>
-                <a:ea typeface="MB Corpo S Text Office" pitchFamily="34" charset="-122"/>
-                <a:cs typeface="MB Corpo S Text Office" pitchFamily="34" charset="-120"/>
-              </a:rPr>
-              <a:t>Produktänderung, Versionierung und Bestandswirkung</a:t>
-            </a:r>
-            <a:endParaRPr lang="en-US" sz="900" dirty="0"/>
-          </a:p>
-          <a:p>
-            <a:pPr marL="152400" indent="-152400">
-              <a:spcAft>
-                <a:spcPts val="100"/>
-              </a:spcAft>
-              <a:buSzPct val="100000"/>
-              <a:buChar char="•"/>
-            </a:pPr>
-            <a:r>
-              <a:rPr lang="en-US" sz="900" dirty="0">
-                <a:solidFill>
-                  <a:srgbClr val="262626"/>
-                </a:solidFill>
-                <a:latin typeface="MB Corpo S Text Office" pitchFamily="34" charset="0"/>
-                <a:ea typeface="MB Corpo S Text Office" pitchFamily="34" charset="-122"/>
-                <a:cs typeface="MB Corpo S Text Office" pitchFamily="34" charset="-120"/>
-              </a:rPr>
-              <a:t>Fahrzeuggruppen und Van-Baumuster-Clustering</a:t>
-            </a:r>
-            <a:endParaRPr lang="en-US" sz="900" dirty="0"/>
-          </a:p>
-          <a:p>
-            <a:pPr marL="152400" indent="-152400">
-              <a:spcAft>
-                <a:spcPts val="100"/>
-              </a:spcAft>
-              <a:buSzPct val="100000"/>
-              <a:buChar char="•"/>
-            </a:pPr>
-            <a:r>
-              <a:rPr lang="en-US" sz="900" dirty="0">
-                <a:solidFill>
-                  <a:srgbClr val="262626"/>
-                </a:solidFill>
-                <a:latin typeface="MB Corpo S Text Office" pitchFamily="34" charset="0"/>
-                <a:ea typeface="MB Corpo S Text Office" pitchFamily="34" charset="-122"/>
-                <a:cs typeface="MB Corpo S Text Office" pitchFamily="34" charset="-120"/>
-              </a:rPr>
-              <a:t>Product Testing als Arbeitsbereich</a:t>
-            </a:r>
-            <a:endParaRPr lang="en-US" sz="900" dirty="0"/>
-          </a:p>
-          <a:p>
-            <a:pPr marL="152400" indent="-152400">
-              <a:spcAft>
-                <a:spcPts val="100"/>
-              </a:spcAft>
-              <a:buSzPct val="100000"/>
-              <a:buChar char="•"/>
-            </a:pPr>
-            <a:r>
-              <a:rPr lang="en-US" sz="900" dirty="0">
-                <a:solidFill>
-                  <a:srgbClr val="262626"/>
-                </a:solidFill>
-                <a:latin typeface="MB Corpo S Text Office" pitchFamily="34" charset="0"/>
-                <a:ea typeface="MB Corpo S Text Office" pitchFamily="34" charset="-122"/>
-                <a:cs typeface="MB Corpo S Text Office" pitchFamily="34" charset="-120"/>
-              </a:rPr>
-              <a:t>Kampagnenanlage und Rabattpflege</a:t>
-            </a:r>
-            <a:endParaRPr lang="en-US" sz="900" dirty="0"/>
-          </a:p>
-          <a:p>
-            <a:pPr marL="152400" indent="-152400">
-              <a:spcAft>
-                <a:spcPts val="100"/>
-              </a:spcAft>
-              <a:buSzPct val="100000"/>
-              <a:buChar char="•"/>
-            </a:pPr>
-            <a:r>
-              <a:rPr lang="en-US" sz="900" dirty="0">
-                <a:solidFill>
-                  <a:srgbClr val="262626"/>
-                </a:solidFill>
-                <a:latin typeface="MB Corpo S Text Office" pitchFamily="34" charset="0"/>
-                <a:ea typeface="MB Corpo S Text Office" pitchFamily="34" charset="-122"/>
-                <a:cs typeface="MB Corpo S Text Office" pitchFamily="34" charset="-120"/>
-              </a:rPr>
-              <a:t>Preiskomponenten, Cost Unit Split und Inflation</a:t>
-            </a:r>
-            <a:endParaRPr lang="en-US" sz="900" dirty="0"/>
+              <a:rPr lang="en-US" sz="1100" b="1" dirty="0">
+                <a:solidFill>
+                  <a:srgbClr val="262626"/>
+                </a:solidFill>
+                <a:latin typeface="MB Corpo A Title Cond Office" pitchFamily="34" charset="0"/>
+                <a:ea typeface="MB Corpo A Title Cond Office" pitchFamily="34" charset="-122"/>
+                <a:cs typeface="MB Corpo A Title Cond Office" pitchFamily="34" charset="-120"/>
+              </a:rPr>
+              <a:t>So gehen Sie vor</a:t>
+            </a:r>
+            <a:endParaRPr lang="en-US" sz="1100" dirty="0"/>
           </a:p>
         </p:txBody>
       </p:sp>
       <p:sp>
         <p:nvSpPr>
-          <p:cNvPr id="17" name="Abschnittstitel"/>
+          <p:cNvPr id="18" name="Schritte"/>
           <p:cNvSpPr txBox="1"/>
           <p:nvPr/>
         </p:nvSpPr>
         <p:spPr>
           <a:xfrm>
-            <a:off x="5047488" y="713232"/>
-            <a:ext cx="2816352" cy="256032"/>
+            <a:off x="5065776" y="2606040"/>
+            <a:ext cx="4645152" cy="1207008"/>
           </a:xfrm>
           <a:prstGeom prst="rect">
             <a:avLst/>
@@ -2004,45 +2010,6 @@
           <a:bodyPr wrap="square" lIns="0" tIns="0" rIns="0" bIns="0" rtlCol="0" anchor="t"/>
           <a:lstStyle/>
           <a:p>
-            <a:pPr indent="0" marL="0">
-              <a:buNone/>
-            </a:pPr>
-            <a:r>
-              <a:rPr lang="en-US" sz="1100" b="1" dirty="0">
-                <a:solidFill>
-                  <a:srgbClr val="262626"/>
-                </a:solidFill>
-                <a:latin typeface="MB Corpo A Title Cond Office" pitchFamily="34" charset="0"/>
-                <a:ea typeface="MB Corpo A Title Cond Office" pitchFamily="34" charset="-122"/>
-                <a:cs typeface="MB Corpo A Title Cond Office" pitchFamily="34" charset="-120"/>
-              </a:rPr>
-              <a:t>So gehen Sie vor</a:t>
-            </a:r>
-            <a:endParaRPr lang="en-US" sz="1100" dirty="0"/>
-          </a:p>
-        </p:txBody>
-      </p:sp>
-      <p:sp>
-        <p:nvSpPr>
-          <p:cNvPr id="18" name="Schritte"/>
-          <p:cNvSpPr txBox="1"/>
-          <p:nvPr/>
-        </p:nvSpPr>
-        <p:spPr>
-          <a:xfrm>
-            <a:off x="5065776" y="987552"/>
-            <a:ext cx="2798064" cy="2029968"/>
-          </a:xfrm>
-          <a:prstGeom prst="rect">
-            <a:avLst/>
-          </a:prstGeom>
-          <a:noFill/>
-          <a:ln/>
-        </p:spPr>
-        <p:txBody>
-          <a:bodyPr wrap="square" lIns="0" tIns="0" rIns="0" bIns="0" rtlCol="0" anchor="t"/>
-          <a:lstStyle/>
-          <a:p>
             <a:pPr marL="203200" indent="-203200">
               <a:spcAft>
                 <a:spcPts val="400"/>
@@ -2343,99 +2310,18 @@
       </p:sp>
       <p:sp>
         <p:nvSpPr>
-          <p:cNvPr id="19" name="Screenshot-Rahmen"/>
+          <p:cNvPr id="19" name="Warnhinweis"/>
           <p:cNvSpPr/>
           <p:nvPr/>
         </p:nvSpPr>
         <p:spPr>
           <a:xfrm>
-            <a:off x="7973568" y="987552"/>
-            <a:ext cx="1737360" cy="1463040"/>
-          </a:xfrm>
-          <a:prstGeom prst="rect">
-            <a:avLst/>
-          </a:prstGeom>
-          <a:solidFill>
-            <a:srgbClr val="F3F3F3"/>
-          </a:solidFill>
-          <a:ln w="6350">
-            <a:solidFill>
-              <a:srgbClr val="BFBFBF"/>
-            </a:solidFill>
-            <a:prstDash val="solid"/>
-          </a:ln>
-        </p:spPr>
-      </p:sp>
-      <p:sp>
-        <p:nvSpPr>
-          <p:cNvPr id="20" name="Screenshot-Beschriftung"/>
-          <p:cNvSpPr txBox="1"/>
-          <p:nvPr/>
-        </p:nvSpPr>
-        <p:spPr>
-          <a:xfrm>
-            <a:off x="7973568" y="987552"/>
-            <a:ext cx="1737360" cy="1463040"/>
-          </a:xfrm>
-          <a:prstGeom prst="rect">
-            <a:avLst/>
-          </a:prstGeom>
-          <a:noFill/>
-          <a:ln/>
-        </p:spPr>
-        <p:txBody>
-          <a:bodyPr wrap="square" lIns="50800" tIns="50800" rIns="50800" bIns="50800" rtlCol="0" anchor="ctr"/>
-          <a:lstStyle/>
-          <a:p>
-            <a:pPr algn="ctr" indent="0" marL="0">
-              <a:buNone/>
-            </a:pPr>
-            <a:r>
-              <a:rPr lang="en-US" sz="700" b="1" dirty="0">
-                <a:solidFill>
-                  <a:srgbClr val="404040"/>
-                </a:solidFill>
-                <a:latin typeface="MB Corpo S Text Office" pitchFamily="34" charset="0"/>
-                <a:ea typeface="MB Corpo S Text Office" pitchFamily="34" charset="-122"/>
-                <a:cs typeface="MB Corpo S Text Office" pitchFamily="34" charset="-120"/>
-              </a:rPr>
-              <a:t>Screenshot</a:t>
-            </a:r>
-            <a:endParaRPr lang="en-US" sz="700" dirty="0"/>
-          </a:p>
-          <a:p>
-            <a:pPr algn="ctr" indent="0" marL="0">
-              <a:buNone/>
-            </a:pPr>
-            <a:r>
-              <a:rPr lang="en-US" sz="700" dirty="0">
-                <a:solidFill>
-                  <a:srgbClr val="404040"/>
-                </a:solidFill>
-                <a:latin typeface="MB Corpo S Text Office" pitchFamily="34" charset="0"/>
-                <a:ea typeface="MB Corpo S Text Office" pitchFamily="34" charset="-122"/>
-                <a:cs typeface="MB Corpo S Text Office" pitchFamily="34" charset="-120"/>
-              </a:rPr>
-              <a:t>Preisversion anlegen</a:t>
-            </a:r>
-            <a:endParaRPr lang="en-US" sz="700" dirty="0"/>
-          </a:p>
-        </p:txBody>
-      </p:sp>
-      <p:sp>
-        <p:nvSpPr>
-          <p:cNvPr id="21" name="Warnhinweis"/>
-          <p:cNvSpPr/>
-          <p:nvPr/>
-        </p:nvSpPr>
-        <p:spPr>
-          <a:xfrm>
-            <a:off x="5047488" y="3127248"/>
-            <a:ext cx="4663440" cy="612648"/>
+            <a:off x="5047488" y="3922776"/>
+            <a:ext cx="4663440" cy="475488"/>
           </a:xfrm>
           <a:prstGeom prst="roundRect">
             <a:avLst>
-              <a:gd name="adj" fmla="val 11940"/>
+              <a:gd name="adj" fmla="val 15385"/>
             </a:avLst>
           </a:prstGeom>
           <a:solidFill>
@@ -2451,14 +2337,14 @@
       </p:sp>
       <p:sp>
         <p:nvSpPr>
-          <p:cNvPr id="22" name="Warnzeichen"/>
+          <p:cNvPr id="20" name="Warnzeichen"/>
           <p:cNvSpPr txBox="1"/>
           <p:nvPr/>
         </p:nvSpPr>
         <p:spPr>
           <a:xfrm>
-            <a:off x="5120640" y="3127248"/>
-            <a:ext cx="274320" cy="612648"/>
+            <a:off x="5120640" y="3922776"/>
+            <a:ext cx="274320" cy="475488"/>
           </a:xfrm>
           <a:prstGeom prst="rect">
             <a:avLst/>
@@ -2490,14 +2376,14 @@
       </p:sp>
       <p:sp>
         <p:nvSpPr>
-          <p:cNvPr id="23" name="Warntext"/>
+          <p:cNvPr id="21" name="Warntext"/>
           <p:cNvSpPr txBox="1"/>
           <p:nvPr/>
         </p:nvSpPr>
         <p:spPr>
           <a:xfrm>
-            <a:off x="5458968" y="3127248"/>
-            <a:ext cx="4160520" cy="612648"/>
+            <a:off x="5458968" y="3922776"/>
+            <a:ext cx="4160520" cy="475488"/>
           </a:xfrm>
           <a:prstGeom prst="rect">
             <a:avLst/>
@@ -2540,13 +2426,13 @@
       </p:sp>
       <p:sp>
         <p:nvSpPr>
-          <p:cNvPr id="24" name="Schritte"/>
+          <p:cNvPr id="22" name="Schritte"/>
           <p:cNvSpPr txBox="1"/>
           <p:nvPr/>
         </p:nvSpPr>
         <p:spPr>
           <a:xfrm>
-            <a:off x="5065776" y="3849624"/>
+            <a:off x="5065776" y="4507992"/>
             <a:ext cx="4645152" cy="886968"/>
           </a:xfrm>
           <a:prstGeom prst="rect">
@@ -3072,11 +2958,11 @@
         <p:spPr>
           <a:xfrm>
             <a:off x="201168" y="713232"/>
-            <a:ext cx="4663440" cy="1965960"/>
+            <a:ext cx="4663440" cy="2112264"/>
           </a:xfrm>
           <a:prstGeom prst="roundRect">
             <a:avLst>
-              <a:gd name="adj" fmla="val 4651"/>
+              <a:gd name="adj" fmla="val 4329"/>
             </a:avLst>
           </a:prstGeom>
           <a:solidFill>
@@ -3140,7 +3026,7 @@
         <p:spPr>
           <a:xfrm>
             <a:off x="310896" y="1060704"/>
-            <a:ext cx="4480560" cy="1563624"/>
+            <a:ext cx="4480560" cy="1709928"/>
           </a:xfrm>
           <a:prstGeom prst="rect">
             <a:avLst/>
@@ -3380,12 +3266,12 @@
         </p:nvSpPr>
         <p:spPr>
           <a:xfrm>
-            <a:off x="201168" y="2788920"/>
-            <a:ext cx="4663440" cy="1115568"/>
+            <a:off x="201168" y="2935224"/>
+            <a:ext cx="4663440" cy="1197864"/>
           </a:xfrm>
           <a:prstGeom prst="roundRect">
             <a:avLst>
-              <a:gd name="adj" fmla="val 8197"/>
+              <a:gd name="adj" fmla="val 7634"/>
             </a:avLst>
           </a:prstGeom>
           <a:solidFill>
@@ -3409,7 +3295,7 @@
         </p:nvSpPr>
         <p:spPr>
           <a:xfrm>
-            <a:off x="310896" y="2862072"/>
+            <a:off x="310896" y="3008376"/>
             <a:ext cx="4480560" cy="256032"/>
           </a:xfrm>
           <a:prstGeom prst="rect">
@@ -3448,8 +3334,8 @@
         </p:nvSpPr>
         <p:spPr>
           <a:xfrm>
-            <a:off x="310896" y="3136392"/>
-            <a:ext cx="4480560" cy="713232"/>
+            <a:off x="310896" y="3282696"/>
+            <a:ext cx="4480560" cy="795528"/>
           </a:xfrm>
           <a:prstGeom prst="rect">
             <a:avLst/>
@@ -3554,12 +3440,12 @@
         </p:nvSpPr>
         <p:spPr>
           <a:xfrm>
-            <a:off x="201168" y="4014216"/>
-            <a:ext cx="4663440" cy="1225296"/>
+            <a:off x="201168" y="4242816"/>
+            <a:ext cx="4663440" cy="1316736"/>
           </a:xfrm>
           <a:prstGeom prst="roundRect">
             <a:avLst>
-              <a:gd name="adj" fmla="val 7463"/>
+              <a:gd name="adj" fmla="val 6944"/>
             </a:avLst>
           </a:prstGeom>
           <a:solidFill>
@@ -3583,7 +3469,7 @@
         </p:nvSpPr>
         <p:spPr>
           <a:xfrm>
-            <a:off x="310896" y="4087368"/>
+            <a:off x="310896" y="4315968"/>
             <a:ext cx="4480560" cy="256032"/>
           </a:xfrm>
           <a:prstGeom prst="rect">
@@ -3622,8 +3508,8 @@
         </p:nvSpPr>
         <p:spPr>
           <a:xfrm>
-            <a:off x="310896" y="4361688"/>
-            <a:ext cx="4480560" cy="822960"/>
+            <a:off x="310896" y="4590288"/>
+            <a:ext cx="4480560" cy="914400"/>
           </a:xfrm>
           <a:prstGeom prst="rect">
             <a:avLst/>
@@ -3699,15 +3585,39 @@
           </a:p>
         </p:txBody>
       </p:sp>
-      <p:sp>
-        <p:nvSpPr>
-          <p:cNvPr id="17" name="FAQ"/>
+      <p:pic>
+        <p:nvPicPr>
+          <p:cNvPr id="17" name="Prozessbild" descr="/tmp/claude-0/-home-user-step2-oneSCM/768b354c-b2c6-524c-b102-2abaf010b0fe/scratchpad/qg/src/img/landscape_14.png">    </p:cNvPr>
+          <p:cNvPicPr>
+            <a:picLocks noChangeAspect="1"/>
+          </p:cNvPicPr>
+          <p:nvPr/>
+        </p:nvPicPr>
+        <p:blipFill>
+          <a:blip r:embed="rId3"/>
+          <a:stretch>
+            <a:fillRect/>
+          </a:stretch>
+        </p:blipFill>
+        <p:spPr>
+          <a:xfrm>
+            <a:off x="5047488" y="713232"/>
+            <a:ext cx="4663440" cy="1207008"/>
+          </a:xfrm>
+          <a:prstGeom prst="rect">
+            <a:avLst/>
+          </a:prstGeom>
+        </p:spPr>
+      </p:pic>
+      <p:sp>
+        <p:nvSpPr>
+          <p:cNvPr id="18" name="FAQ"/>
           <p:cNvSpPr/>
           <p:nvPr/>
         </p:nvSpPr>
         <p:spPr>
           <a:xfrm>
-            <a:off x="5047488" y="713232"/>
+            <a:off x="5047488" y="2029968"/>
             <a:ext cx="4663440" cy="1536192"/>
           </a:xfrm>
           <a:prstGeom prst="roundRect">
@@ -3730,13 +3640,13 @@
       </p:sp>
       <p:sp>
         <p:nvSpPr>
-          <p:cNvPr id="18" name="FAQ Inhalt"/>
+          <p:cNvPr id="19" name="FAQ Inhalt"/>
           <p:cNvSpPr txBox="1"/>
           <p:nvPr/>
         </p:nvSpPr>
         <p:spPr>
           <a:xfrm>
-            <a:off x="5157216" y="786384"/>
+            <a:off x="5157216" y="2103120"/>
             <a:ext cx="4443984" cy="1408176"/>
           </a:xfrm>
           <a:prstGeom prst="rect">
@@ -3868,18 +3778,18 @@
       </p:sp>
       <p:sp>
         <p:nvSpPr>
-          <p:cNvPr id="19" name="Wichtige Links und Ansprechpartner"/>
+          <p:cNvPr id="20" name="Wichtige Links und Ansprechpartner"/>
           <p:cNvSpPr/>
           <p:nvPr/>
         </p:nvSpPr>
         <p:spPr>
           <a:xfrm>
-            <a:off x="5047488" y="2359152"/>
-            <a:ext cx="4663440" cy="1389888"/>
+            <a:off x="5047488" y="3675888"/>
+            <a:ext cx="4663440" cy="1490472"/>
           </a:xfrm>
           <a:prstGeom prst="roundRect">
             <a:avLst>
-              <a:gd name="adj" fmla="val 6579"/>
+              <a:gd name="adj" fmla="val 6135"/>
             </a:avLst>
           </a:prstGeom>
           <a:solidFill>
@@ -3897,13 +3807,13 @@
       </p:sp>
       <p:sp>
         <p:nvSpPr>
-          <p:cNvPr id="20" name="Kartentitel"/>
+          <p:cNvPr id="21" name="Kartentitel"/>
           <p:cNvSpPr txBox="1"/>
           <p:nvPr/>
         </p:nvSpPr>
         <p:spPr>
           <a:xfrm>
-            <a:off x="5157216" y="2432304"/>
+            <a:off x="5157216" y="3749040"/>
             <a:ext cx="4480560" cy="256032"/>
           </a:xfrm>
           <a:prstGeom prst="rect">
@@ -3936,14 +3846,14 @@
       </p:sp>
       <p:sp>
         <p:nvSpPr>
-          <p:cNvPr id="21" name="Karteninhalt"/>
+          <p:cNvPr id="22" name="Karteninhalt"/>
           <p:cNvSpPr txBox="1"/>
           <p:nvPr/>
         </p:nvSpPr>
         <p:spPr>
           <a:xfrm>
-            <a:off x="5157216" y="2706624"/>
-            <a:ext cx="4480560" cy="987552"/>
+            <a:off x="5157216" y="4023360"/>
+            <a:ext cx="4480560" cy="1088136"/>
           </a:xfrm>
           <a:prstGeom prst="rect">
             <a:avLst/>

--- a/docs/quickguides/pptx/14_Quick_Guide_oneSCM_Marktrolle_Produkt_und_Preispflege_sowie_Administration.pptx
+++ b/docs/quickguides/pptx/14_Quick_Guide_oneSCM_Marktrolle_Produkt_und_Preispflege_sowie_Administration.pptx
@@ -1159,7 +1159,7 @@
                 <a:ea typeface="MB Corpo S Text Office" pitchFamily="34" charset="-122"/>
                 <a:cs typeface="MB Corpo S Text Office" pitchFamily="34" charset="-120"/>
               </a:rPr>
-              <a:t>: Dieser Quick Guide fasst Kapitel 14 des oneSCM-Handbuchs zusammen. Details, Bildschirmbilder und Nachweise finden Sie im Handbuchkapitel.</a:t>
+              <a:t>: Dieser Quick Guide fasst Kapitel 14 des oneSCM-Handbuchs zusammen. Details, Bildschirmbilder und Nachweise finden Sie im Handbuch.</a:t>
             </a:r>
             <a:endParaRPr lang="en-US" sz="800" dirty="0"/>
           </a:p>
@@ -2904,7 +2904,7 @@
                 <a:ea typeface="MB Corpo S Text Office" pitchFamily="34" charset="-122"/>
                 <a:cs typeface="MB Corpo S Text Office" pitchFamily="34" charset="-120"/>
               </a:rPr>
-              <a:t>: Dieser Quick Guide fasst Kapitel 14 des oneSCM-Handbuchs zusammen. Details, Bildschirmbilder und Nachweise finden Sie im Handbuchkapitel.</a:t>
+              <a:t>: Dieser Quick Guide fasst Kapitel 14 des oneSCM-Handbuchs zusammen. Details, Bildschirmbilder und Nachweise finden Sie im Handbuch.</a:t>
             </a:r>
             <a:endParaRPr lang="en-US" sz="800" dirty="0"/>
           </a:p>

--- a/docs/quickguides/pptx/14_Quick_Guide_oneSCM_Marktrolle_Produkt_und_Preispflege_sowie_Administration.pptx
+++ b/docs/quickguides/pptx/14_Quick_Guide_oneSCM_Marktrolle_Produkt_und_Preispflege_sowie_Administration.pptx
@@ -1503,7 +1503,7 @@
                 <a:ea typeface="MB Corpo S Text Office" pitchFamily="34" charset="-122"/>
                 <a:cs typeface="MB Corpo S Text Office" pitchFamily="34" charset="-120"/>
               </a:rPr>
-              <a:t>Dieses Dokument ist interaktiv – Verweise auf Handbuchkapitel und Systeme sind als Links hinterlegt.</a:t>
+              <a:t>Verweise auf Handbuchkapitel und Systeme sind hervorgehoben; E-Mail-Adressen sind als Links hinterlegt.</a:t>
             </a:r>
             <a:endParaRPr lang="en-US" sz="900" dirty="0"/>
           </a:p>
@@ -3441,11 +3441,11 @@
         <p:spPr>
           <a:xfrm>
             <a:off x="201168" y="4242816"/>
-            <a:ext cx="4663440" cy="1316736"/>
+            <a:ext cx="4663440" cy="1792224"/>
           </a:xfrm>
           <a:prstGeom prst="roundRect">
             <a:avLst>
-              <a:gd name="adj" fmla="val 6944"/>
+              <a:gd name="adj" fmla="val 5102"/>
             </a:avLst>
           </a:prstGeom>
           <a:solidFill>
@@ -3509,7 +3509,7 @@
         <p:spPr>
           <a:xfrm>
             <a:off x="310896" y="4590288"/>
-            <a:ext cx="4480560" cy="914400"/>
+            <a:ext cx="4480560" cy="1389888"/>
           </a:xfrm>
           <a:prstGeom prst="rect">
             <a:avLst/>
@@ -3537,7 +3537,7 @@
                 <a:ea typeface="MB Corpo S Text Office" pitchFamily="34" charset="-122"/>
                 <a:cs typeface="MB Corpo S Text Office" pitchFamily="34" charset="-120"/>
               </a:rPr>
-              <a:t>Länderabweichungen müssen im Register (Kapitel 20.6) dokumentiert sein, sonst gilt der Blueprint.</a:t>
+              <a:t>Ein Cluster für den relativen Basispreis erfordert einen Preisfaktor (14.9).</a:t>
             </a:r>
             <a:endParaRPr lang="en-US" sz="900" dirty="0"/>
           </a:p>
@@ -3558,7 +3558,7 @@
                 <a:ea typeface="MB Corpo S Text Office" pitchFamily="34" charset="-122"/>
                 <a:cs typeface="MB Corpo S Text Office" pitchFamily="34" charset="-120"/>
               </a:rPr>
-              <a:t>Produktänderungen wirken je nach Versionierung nur auf Neuverträge oder auch auf den Bestand (14.10).</a:t>
+              <a:t>Fahrzeuggruppen: Das Produkt mit aktueller Preisversion ist vorausgewählt, abgelaufene Preisversionen erscheinen nicht; Name und Beschreibung erzeugt das System auf Wunsch aus den Filtern (14.11).</a:t>
             </a:r>
             <a:endParaRPr lang="en-US" sz="900" dirty="0"/>
           </a:p>
@@ -3579,7 +3579,28 @@
                 <a:ea typeface="MB Corpo S Text Office" pitchFamily="34" charset="-122"/>
                 <a:cs typeface="MB Corpo S Text Office" pitchFamily="34" charset="-120"/>
               </a:rPr>
-              <a:t>Übergangsmodule T14-15 und T15-14 beschreiben das Zusammenspiel mit HQ.</a:t>
+              <a:t>Beim Duplizieren einer Kampagne setzt das System die External Campaign ID zurück; deaktivierte Kampagnen bleiben bearbeitbar (14.13).</a:t>
+            </a:r>
+            <a:endParaRPr lang="en-US" sz="900" dirty="0"/>
+          </a:p>
+          <a:p>
+            <a:pPr marL="152400" indent="-152400">
+              <a:spcAft>
+                <a:spcPts val="200"/>
+              </a:spcAft>
+              <a:buSzPct val="100000"/>
+              <a:buChar char="•"/>
+            </a:pPr>
+            <a:r>
+              <a:rPr lang="en-US" sz="900" dirty="0">
+                <a:solidFill>
+                  <a:srgbClr val="262626"/>
+                </a:solidFill>
+                <a:latin typeface="MB Corpo S Text Office" pitchFamily="34" charset="0"/>
+                <a:ea typeface="MB Corpo S Text Office" pitchFamily="34" charset="-122"/>
+                <a:cs typeface="MB Corpo S Text Office" pitchFamily="34" charset="-120"/>
+              </a:rPr>
+              <a:t>Produktänderungen wirken je nach Versionierung nur auf Neuverträge oder auch auf den Bestand (14.10).</a:t>
             </a:r>
             <a:endParaRPr lang="en-US" sz="900" dirty="0"/>
           </a:p>
